--- a/public/fun/cards/creative/creative-03.pptx
+++ b/public/fun/cards/creative/creative-03.pptx
@@ -3085,7 +3085,7 @@
     <p:bg>
       <p:bgPr>
         <a:solidFill>
-          <a:srgbClr val="FBF8F2"/>
+          <a:srgbClr val="FFF4F8"/>
         </a:solidFill>
         <a:effectLst/>
       </p:bgPr>
@@ -3099,20 +3099,20 @@
       <p:grpSpPr/>
       <p:sp>
         <p:nvSpPr>
-          <p:cNvPr id="2" name="Rectangle 1"/>
+          <p:cNvPr id="2" name="Oval 1"/>
           <p:cNvSpPr/>
           <p:nvPr/>
         </p:nvSpPr>
         <p:spPr>
           <a:xfrm>
-            <a:off x="0" y="0"/>
-            <a:ext cx="3240000" cy="720000"/>
+            <a:off x="1591200" y="208800"/>
+            <a:ext cx="57600" cy="57600"/>
           </a:xfrm>
-          <a:prstGeom prst="rect">
+          <a:prstGeom prst="ellipse">
             <a:avLst/>
           </a:prstGeom>
           <a:solidFill>
-            <a:srgbClr val="4B3D8F"/>
+            <a:srgbClr val="FF8FB8"/>
           </a:solidFill>
           <a:ln>
             <a:noFill/>
@@ -3128,105 +3128,14 @@
       </p:sp>
       <p:sp>
         <p:nvSpPr>
-          <p:cNvPr id="3" name="Oval 2"/>
-          <p:cNvSpPr/>
+          <p:cNvPr id="3" name="텍스트"/>
+          <p:cNvSpPr txBox="1"/>
           <p:nvPr/>
         </p:nvSpPr>
         <p:spPr>
           <a:xfrm>
-            <a:off x="2750688" y="218304"/>
-            <a:ext cx="186624" cy="186624"/>
-          </a:xfrm>
-          <a:prstGeom prst="ellipse">
-            <a:avLst/>
-          </a:prstGeom>
-          <a:solidFill>
-            <a:srgbClr val="FFFFFF"/>
-          </a:solidFill>
-          <a:ln>
-            <a:noFill/>
-          </a:ln>
-        </p:spPr>
-        <p:txBody>
-          <a:bodyPr rtlCol="0" anchor="ctr"/>
-          <a:lstStyle/>
-          <a:p>
-            <a:pPr algn="ctr"/>
-          </a:p>
-        </p:txBody>
-      </p:sp>
-      <p:sp>
-        <p:nvSpPr>
-          <p:cNvPr id="4" name="Rounded Rectangle 3"/>
-          <p:cNvSpPr/>
-          <p:nvPr/>
-        </p:nvSpPr>
-        <p:spPr>
-          <a:xfrm>
-            <a:off x="2799072" y="401472"/>
-            <a:ext cx="89856" cy="55296"/>
-          </a:xfrm>
-          <a:prstGeom prst="roundRect">
-            <a:avLst>
-              <a:gd name="adj" fmla="val 18750"/>
-            </a:avLst>
-          </a:prstGeom>
-          <a:solidFill>
-            <a:srgbClr val="666666"/>
-          </a:solidFill>
-          <a:ln>
-            <a:noFill/>
-          </a:ln>
-        </p:spPr>
-        <p:txBody>
-          <a:bodyPr rtlCol="0" anchor="ctr"/>
-          <a:lstStyle/>
-          <a:p>
-            <a:pPr algn="ctr"/>
-          </a:p>
-        </p:txBody>
-      </p:sp>
-      <p:sp>
-        <p:nvSpPr>
-          <p:cNvPr id="5" name="Rounded Rectangle 4"/>
-          <p:cNvSpPr/>
-          <p:nvPr/>
-        </p:nvSpPr>
-        <p:spPr>
-          <a:xfrm>
-            <a:off x="2812896" y="467136"/>
-            <a:ext cx="62208" cy="31104"/>
-          </a:xfrm>
-          <a:prstGeom prst="roundRect">
-            <a:avLst>
-              <a:gd name="adj" fmla="val 33333"/>
-            </a:avLst>
-          </a:prstGeom>
-          <a:solidFill>
-            <a:srgbClr val="666666"/>
-          </a:solidFill>
-          <a:ln>
-            <a:noFill/>
-          </a:ln>
-        </p:spPr>
-        <p:txBody>
-          <a:bodyPr rtlCol="0" anchor="ctr"/>
-          <a:lstStyle/>
-          <a:p>
-            <a:pPr algn="ctr"/>
-          </a:p>
-        </p:txBody>
-      </p:sp>
-      <p:sp>
-        <p:nvSpPr>
-          <p:cNvPr id="6" name="텍스트"/>
-          <p:cNvSpPr txBox="1"/>
-          <p:nvPr/>
-        </p:nvSpPr>
-        <p:spPr>
-          <a:xfrm>
-            <a:off x="230400" y="187200"/>
-            <a:ext cx="2160000" cy="305437"/>
+            <a:off x="360000" y="468000"/>
+            <a:ext cx="2520000" cy="360000"/>
           </a:xfrm>
           <a:prstGeom prst="rect">
             <a:avLst/>
@@ -3239,15 +3148,15 @@
           </a:bodyPr>
           <a:lstStyle/>
           <a:p>
-            <a:pPr algn="l">
+            <a:pPr algn="ctr">
               <a:lnSpc>
-                <a:spcPts val="2682"/>
+                <a:spcPts val="3190"/>
               </a:lnSpc>
             </a:pPr>
             <a:r>
-              <a:rPr sz="1850" b="1" spc="50">
+              <a:rPr sz="2200" b="1">
                 <a:solidFill>
-                  <a:srgbClr val="FFFFFF"/>
+                  <a:srgbClr val="12151C"/>
                 </a:solidFill>
                 <a:latin typeface="맑은 고딕"/>
                 <a:ea typeface="맑은 고딕"/>
@@ -3259,14 +3168,14 @@
       </p:sp>
       <p:sp>
         <p:nvSpPr>
-          <p:cNvPr id="7" name="텍스트"/>
+          <p:cNvPr id="4" name="텍스트"/>
           <p:cNvSpPr txBox="1"/>
           <p:nvPr/>
         </p:nvSpPr>
         <p:spPr>
           <a:xfrm>
-            <a:off x="230400" y="475200"/>
-            <a:ext cx="2160000" cy="122400"/>
+            <a:off x="360000" y="878400"/>
+            <a:ext cx="2520000" cy="171451"/>
           </a:xfrm>
           <a:prstGeom prst="rect">
             <a:avLst/>
@@ -3279,15 +3188,15 @@
           </a:bodyPr>
           <a:lstStyle/>
           <a:p>
-            <a:pPr algn="l">
+            <a:pPr algn="ctr">
               <a:lnSpc>
-                <a:spcPts val="1232"/>
+                <a:spcPts val="1305"/>
               </a:lnSpc>
             </a:pPr>
             <a:r>
-              <a:rPr sz="850" b="1">
+              <a:rPr sz="900" b="0">
                 <a:solidFill>
-                  <a:srgbClr val="FFFFFF"/>
+                  <a:srgbClr val="6C4357"/>
                 </a:solidFill>
                 <a:latin typeface="맑은 고딕"/>
                 <a:ea typeface="맑은 고딕"/>
@@ -3299,14 +3208,43 @@
       </p:sp>
       <p:sp>
         <p:nvSpPr>
-          <p:cNvPr id="8" name="텍스트"/>
+          <p:cNvPr id="5" name="Rectangle 4"/>
+          <p:cNvSpPr/>
+          <p:nvPr/>
+        </p:nvSpPr>
+        <p:spPr>
+          <a:xfrm>
+            <a:off x="1530000" y="1137600"/>
+            <a:ext cx="180000" cy="14400"/>
+          </a:xfrm>
+          <a:prstGeom prst="rect">
+            <a:avLst/>
+          </a:prstGeom>
+          <a:solidFill>
+            <a:srgbClr val="FF8FB8"/>
+          </a:solidFill>
+          <a:ln>
+            <a:noFill/>
+          </a:ln>
+        </p:spPr>
+        <p:txBody>
+          <a:bodyPr rtlCol="0" anchor="ctr"/>
+          <a:lstStyle/>
+          <a:p>
+            <a:pPr algn="ctr"/>
+          </a:p>
+        </p:txBody>
+      </p:sp>
+      <p:sp>
+        <p:nvSpPr>
+          <p:cNvPr id="6" name="텍스트"/>
           <p:cNvSpPr txBox="1"/>
           <p:nvPr/>
         </p:nvSpPr>
         <p:spPr>
           <a:xfrm>
-            <a:off x="230400" y="835200"/>
-            <a:ext cx="1800000" cy="100800"/>
+            <a:off x="360000" y="1267200"/>
+            <a:ext cx="2520000" cy="133351"/>
           </a:xfrm>
           <a:prstGeom prst="rect">
             <a:avLst/>
@@ -3319,34 +3257,34 @@
           </a:bodyPr>
           <a:lstStyle/>
           <a:p>
-            <a:pPr algn="l">
+            <a:pPr algn="ctr">
               <a:lnSpc>
-                <a:spcPts val="1087"/>
+                <a:spcPts val="1015"/>
               </a:lnSpc>
             </a:pPr>
             <a:r>
-              <a:rPr sz="750" b="1" spc="150">
+              <a:rPr sz="700" b="0">
                 <a:solidFill>
-                  <a:srgbClr val="66755B"/>
+                  <a:srgbClr val="12151C"/>
                 </a:solidFill>
                 <a:latin typeface="맑은 고딕"/>
                 <a:ea typeface="맑은 고딕"/>
               </a:rPr>
-              <a:t>스튜디오 이름</a:t>
-            </a:r>
-          </a:p>
-        </p:txBody>
-      </p:sp>
-      <p:sp>
-        <p:nvSpPr>
-          <p:cNvPr id="9" name="텍스트"/>
+              <a:t>010-1234-5678      name@example.com</a:t>
+            </a:r>
+          </a:p>
+        </p:txBody>
+      </p:sp>
+      <p:sp>
+        <p:nvSpPr>
+          <p:cNvPr id="7" name="텍스트"/>
           <p:cNvSpPr txBox="1"/>
           <p:nvPr/>
         </p:nvSpPr>
         <p:spPr>
           <a:xfrm>
-            <a:off x="230400" y="1015200"/>
-            <a:ext cx="122400" cy="168911"/>
+            <a:off x="360000" y="1425600"/>
+            <a:ext cx="2520000" cy="133351"/>
           </a:xfrm>
           <a:prstGeom prst="rect">
             <a:avLst/>
@@ -3359,34 +3297,34 @@
           </a:bodyPr>
           <a:lstStyle/>
           <a:p>
-            <a:pPr algn="l">
+            <a:pPr algn="ctr">
               <a:lnSpc>
                 <a:spcPts val="1015"/>
               </a:lnSpc>
             </a:pPr>
             <a:r>
-              <a:rPr sz="700" b="1">
+              <a:rPr sz="700" b="0">
                 <a:solidFill>
-                  <a:srgbClr val="4B3D8F"/>
+                  <a:srgbClr val="6C4357"/>
                 </a:solidFill>
                 <a:latin typeface="맑은 고딕"/>
                 <a:ea typeface="맑은 고딕"/>
               </a:rPr>
-              <a:t>T</a:t>
-            </a:r>
-          </a:p>
-        </p:txBody>
-      </p:sp>
-      <p:sp>
-        <p:nvSpPr>
-          <p:cNvPr id="10" name="텍스트"/>
+              <a:t>주소를 입력해 주세요</a:t>
+            </a:r>
+          </a:p>
+        </p:txBody>
+      </p:sp>
+      <p:sp>
+        <p:nvSpPr>
+          <p:cNvPr id="8" name="텍스트"/>
           <p:cNvSpPr txBox="1"/>
           <p:nvPr/>
         </p:nvSpPr>
         <p:spPr>
           <a:xfrm>
-            <a:off x="374400" y="1015200"/>
-            <a:ext cx="1872000" cy="168911"/>
+            <a:off x="360000" y="1576800"/>
+            <a:ext cx="2520000" cy="104776"/>
           </a:xfrm>
           <a:prstGeom prst="rect">
             <a:avLst/>
@@ -3399,180 +3337,20 @@
           </a:bodyPr>
           <a:lstStyle/>
           <a:p>
-            <a:pPr algn="l">
+            <a:pPr algn="ctr">
               <a:lnSpc>
-                <a:spcPts val="1015"/>
+                <a:spcPts val="797"/>
               </a:lnSpc>
             </a:pPr>
             <a:r>
-              <a:rPr sz="700" b="0">
+              <a:rPr sz="550" b="1" spc="300">
                 <a:solidFill>
-                  <a:srgbClr val="314F22"/>
+                  <a:srgbClr val="6C4357"/>
                 </a:solidFill>
                 <a:latin typeface="맑은 고딕"/>
                 <a:ea typeface="맑은 고딕"/>
               </a:rPr>
-              <a:t>010-1234-5678</a:t>
-            </a:r>
-          </a:p>
-        </p:txBody>
-      </p:sp>
-      <p:sp>
-        <p:nvSpPr>
-          <p:cNvPr id="11" name="텍스트"/>
-          <p:cNvSpPr txBox="1"/>
-          <p:nvPr/>
-        </p:nvSpPr>
-        <p:spPr>
-          <a:xfrm>
-            <a:off x="230400" y="1184111"/>
-            <a:ext cx="122400" cy="168911"/>
-          </a:xfrm>
-          <a:prstGeom prst="rect">
-            <a:avLst/>
-          </a:prstGeom>
-          <a:noFill/>
-        </p:spPr>
-        <p:txBody>
-          <a:bodyPr wrap="square" lIns="0" rIns="0" tIns="0" bIns="0" anchor="t">
-            <a:spAutoFit/>
-          </a:bodyPr>
-          <a:lstStyle/>
-          <a:p>
-            <a:pPr algn="l">
-              <a:lnSpc>
-                <a:spcPts val="1015"/>
-              </a:lnSpc>
-            </a:pPr>
-            <a:r>
-              <a:rPr sz="700" b="1">
-                <a:solidFill>
-                  <a:srgbClr val="4B3D8F"/>
-                </a:solidFill>
-                <a:latin typeface="맑은 고딕"/>
-                <a:ea typeface="맑은 고딕"/>
-              </a:rPr>
-              <a:t>E</a:t>
-            </a:r>
-          </a:p>
-        </p:txBody>
-      </p:sp>
-      <p:sp>
-        <p:nvSpPr>
-          <p:cNvPr id="12" name="텍스트"/>
-          <p:cNvSpPr txBox="1"/>
-          <p:nvPr/>
-        </p:nvSpPr>
-        <p:spPr>
-          <a:xfrm>
-            <a:off x="374400" y="1184111"/>
-            <a:ext cx="1872000" cy="168911"/>
-          </a:xfrm>
-          <a:prstGeom prst="rect">
-            <a:avLst/>
-          </a:prstGeom>
-          <a:noFill/>
-        </p:spPr>
-        <p:txBody>
-          <a:bodyPr wrap="square" lIns="0" rIns="0" tIns="0" bIns="0" anchor="t">
-            <a:spAutoFit/>
-          </a:bodyPr>
-          <a:lstStyle/>
-          <a:p>
-            <a:pPr algn="l">
-              <a:lnSpc>
-                <a:spcPts val="1015"/>
-              </a:lnSpc>
-            </a:pPr>
-            <a:r>
-              <a:rPr sz="700" b="0">
-                <a:solidFill>
-                  <a:srgbClr val="314F22"/>
-                </a:solidFill>
-                <a:latin typeface="맑은 고딕"/>
-                <a:ea typeface="맑은 고딕"/>
-              </a:rPr>
-              <a:t>name@example.com</a:t>
-            </a:r>
-          </a:p>
-        </p:txBody>
-      </p:sp>
-      <p:sp>
-        <p:nvSpPr>
-          <p:cNvPr id="13" name="텍스트"/>
-          <p:cNvSpPr txBox="1"/>
-          <p:nvPr/>
-        </p:nvSpPr>
-        <p:spPr>
-          <a:xfrm>
-            <a:off x="230400" y="1353022"/>
-            <a:ext cx="122400" cy="168911"/>
-          </a:xfrm>
-          <a:prstGeom prst="rect">
-            <a:avLst/>
-          </a:prstGeom>
-          <a:noFill/>
-        </p:spPr>
-        <p:txBody>
-          <a:bodyPr wrap="square" lIns="0" rIns="0" tIns="0" bIns="0" anchor="t">
-            <a:spAutoFit/>
-          </a:bodyPr>
-          <a:lstStyle/>
-          <a:p>
-            <a:pPr algn="l">
-              <a:lnSpc>
-                <a:spcPts val="1015"/>
-              </a:lnSpc>
-            </a:pPr>
-            <a:r>
-              <a:rPr sz="700" b="1">
-                <a:solidFill>
-                  <a:srgbClr val="4B3D8F"/>
-                </a:solidFill>
-                <a:latin typeface="맑은 고딕"/>
-                <a:ea typeface="맑은 고딕"/>
-              </a:rPr>
-              <a:t>A</a:t>
-            </a:r>
-          </a:p>
-        </p:txBody>
-      </p:sp>
-      <p:sp>
-        <p:nvSpPr>
-          <p:cNvPr id="14" name="텍스트"/>
-          <p:cNvSpPr txBox="1"/>
-          <p:nvPr/>
-        </p:nvSpPr>
-        <p:spPr>
-          <a:xfrm>
-            <a:off x="374400" y="1353022"/>
-            <a:ext cx="1872000" cy="168911"/>
-          </a:xfrm>
-          <a:prstGeom prst="rect">
-            <a:avLst/>
-          </a:prstGeom>
-          <a:noFill/>
-        </p:spPr>
-        <p:txBody>
-          <a:bodyPr wrap="square" lIns="0" rIns="0" tIns="0" bIns="0" anchor="t">
-            <a:spAutoFit/>
-          </a:bodyPr>
-          <a:lstStyle/>
-          <a:p>
-            <a:pPr algn="l">
-              <a:lnSpc>
-                <a:spcPts val="1015"/>
-              </a:lnSpc>
-            </a:pPr>
-            <a:r>
-              <a:rPr sz="700" b="0">
-                <a:solidFill>
-                  <a:srgbClr val="314F22"/>
-                </a:solidFill>
-                <a:latin typeface="맑은 고딕"/>
-                <a:ea typeface="맑은 고딕"/>
-              </a:rPr>
-              <a:t>주소를 입력해 주세요</a:t>
+              <a:t>스튜디오 이름</a:t>
             </a:r>
           </a:p>
         </p:txBody>
@@ -3591,7 +3369,7 @@
     <p:bg>
       <p:bgPr>
         <a:solidFill>
-          <a:srgbClr val="314F22"/>
+          <a:srgbClr val="0E1116"/>
         </a:solidFill>
         <a:effectLst/>
       </p:bgPr>
@@ -3605,77 +3383,20 @@
       <p:grpSpPr/>
       <p:sp>
         <p:nvSpPr>
-          <p:cNvPr id="2" name="Freeform 1"/>
+          <p:cNvPr id="2" name="Oval 1"/>
           <p:cNvSpPr/>
           <p:nvPr/>
         </p:nvSpPr>
         <p:spPr>
           <a:xfrm>
-            <a:off x="2016000" y="576000"/>
-            <a:ext cx="1224000" cy="1224000"/>
+            <a:off x="1411200" y="295200"/>
+            <a:ext cx="417600" cy="417600"/>
           </a:xfrm>
-          <a:custGeom>
+          <a:prstGeom prst="ellipse">
             <a:avLst/>
-            <a:gdLst/>
-            <a:ahLst/>
-            <a:cxnLst/>
-            <a:rect l="l" t="t" r="r" b="b"/>
-            <a:pathLst>
-              <a:path w="1224000" h="1224000">
-                <a:moveTo>
-                  <a:pt x="1224000" y="1224000"/>
-                </a:moveTo>
-                <a:lnTo>
-                  <a:pt x="0" y="1224000"/>
-                </a:lnTo>
-                <a:lnTo>
-                  <a:pt x="7696" y="1086955"/>
-                </a:lnTo>
-                <a:lnTo>
-                  <a:pt x="30688" y="951634"/>
-                </a:lnTo>
-                <a:lnTo>
-                  <a:pt x="68687" y="819738"/>
-                </a:lnTo>
-                <a:lnTo>
-                  <a:pt x="121214" y="692926"/>
-                </a:lnTo>
-                <a:lnTo>
-                  <a:pt x="187610" y="572793"/>
-                </a:lnTo>
-                <a:lnTo>
-                  <a:pt x="267038" y="460848"/>
-                </a:lnTo>
-                <a:lnTo>
-                  <a:pt x="358501" y="358501"/>
-                </a:lnTo>
-                <a:lnTo>
-                  <a:pt x="460848" y="267038"/>
-                </a:lnTo>
-                <a:lnTo>
-                  <a:pt x="572793" y="187610"/>
-                </a:lnTo>
-                <a:lnTo>
-                  <a:pt x="692926" y="121214"/>
-                </a:lnTo>
-                <a:lnTo>
-                  <a:pt x="819738" y="68687"/>
-                </a:lnTo>
-                <a:lnTo>
-                  <a:pt x="951634" y="30688"/>
-                </a:lnTo>
-                <a:lnTo>
-                  <a:pt x="1086955" y="7696"/>
-                </a:lnTo>
-                <a:lnTo>
-                  <a:pt x="1224000" y="0"/>
-                </a:lnTo>
-                <a:close/>
-              </a:path>
-            </a:pathLst>
-          </a:custGeom>
+          </a:prstGeom>
           <a:solidFill>
-            <a:srgbClr val="8AB375"/>
+            <a:srgbClr val="FF8FB8"/>
           </a:solidFill>
           <a:ln>
             <a:noFill/>
@@ -3691,191 +3412,14 @@
       </p:sp>
       <p:sp>
         <p:nvSpPr>
-          <p:cNvPr id="3" name="Freeform 2"/>
-          <p:cNvSpPr/>
+          <p:cNvPr id="3" name="텍스트"/>
+          <p:cNvSpPr txBox="1"/>
           <p:nvPr/>
         </p:nvSpPr>
         <p:spPr>
           <a:xfrm>
-            <a:off x="2520000" y="1080000"/>
-            <a:ext cx="720000" cy="720000"/>
-          </a:xfrm>
-          <a:custGeom>
-            <a:avLst/>
-            <a:gdLst/>
-            <a:ahLst/>
-            <a:cxnLst/>
-            <a:rect l="l" t="t" r="r" b="b"/>
-            <a:pathLst>
-              <a:path w="720000" h="720000">
-                <a:moveTo>
-                  <a:pt x="720000" y="720000"/>
-                </a:moveTo>
-                <a:lnTo>
-                  <a:pt x="0" y="720000"/>
-                </a:lnTo>
-                <a:lnTo>
-                  <a:pt x="4527" y="639386"/>
-                </a:lnTo>
-                <a:lnTo>
-                  <a:pt x="18052" y="559785"/>
-                </a:lnTo>
-                <a:lnTo>
-                  <a:pt x="40404" y="482199"/>
-                </a:lnTo>
-                <a:lnTo>
-                  <a:pt x="71302" y="407604"/>
-                </a:lnTo>
-                <a:lnTo>
-                  <a:pt x="110359" y="336937"/>
-                </a:lnTo>
-                <a:lnTo>
-                  <a:pt x="157081" y="271087"/>
-                </a:lnTo>
-                <a:lnTo>
-                  <a:pt x="210883" y="210883"/>
-                </a:lnTo>
-                <a:lnTo>
-                  <a:pt x="271087" y="157081"/>
-                </a:lnTo>
-                <a:lnTo>
-                  <a:pt x="336937" y="110359"/>
-                </a:lnTo>
-                <a:lnTo>
-                  <a:pt x="407604" y="71302"/>
-                </a:lnTo>
-                <a:lnTo>
-                  <a:pt x="482199" y="40404"/>
-                </a:lnTo>
-                <a:lnTo>
-                  <a:pt x="559785" y="18052"/>
-                </a:lnTo>
-                <a:lnTo>
-                  <a:pt x="639386" y="4527"/>
-                </a:lnTo>
-                <a:lnTo>
-                  <a:pt x="720000" y="0"/>
-                </a:lnTo>
-                <a:close/>
-              </a:path>
-            </a:pathLst>
-          </a:custGeom>
-          <a:solidFill>
-            <a:srgbClr val="526B45"/>
-          </a:solidFill>
-          <a:ln>
-            <a:noFill/>
-          </a:ln>
-        </p:spPr>
-        <p:txBody>
-          <a:bodyPr rtlCol="0" anchor="ctr"/>
-          <a:lstStyle/>
-          <a:p>
-            <a:pPr algn="ctr"/>
-          </a:p>
-        </p:txBody>
-      </p:sp>
-      <p:sp>
-        <p:nvSpPr>
-          <p:cNvPr id="4" name="Oval 3"/>
-          <p:cNvSpPr/>
-          <p:nvPr/>
-        </p:nvSpPr>
-        <p:spPr>
-          <a:xfrm>
-            <a:off x="2811960" y="1372680"/>
-            <a:ext cx="136080" cy="136080"/>
-          </a:xfrm>
-          <a:prstGeom prst="ellipse">
-            <a:avLst/>
-          </a:prstGeom>
-          <a:solidFill>
-            <a:srgbClr val="FFFFFF"/>
-          </a:solidFill>
-          <a:ln>
-            <a:noFill/>
-          </a:ln>
-        </p:spPr>
-        <p:txBody>
-          <a:bodyPr rtlCol="0" anchor="ctr"/>
-          <a:lstStyle/>
-          <a:p>
-            <a:pPr algn="ctr"/>
-          </a:p>
-        </p:txBody>
-      </p:sp>
-      <p:sp>
-        <p:nvSpPr>
-          <p:cNvPr id="5" name="Rounded Rectangle 4"/>
-          <p:cNvSpPr/>
-          <p:nvPr/>
-        </p:nvSpPr>
-        <p:spPr>
-          <a:xfrm>
-            <a:off x="2847240" y="1506240"/>
-            <a:ext cx="65520" cy="40320"/>
-          </a:xfrm>
-          <a:prstGeom prst="roundRect">
-            <a:avLst>
-              <a:gd name="adj" fmla="val 18749"/>
-            </a:avLst>
-          </a:prstGeom>
-          <a:solidFill>
-            <a:srgbClr val="FFFFFF"/>
-          </a:solidFill>
-          <a:ln>
-            <a:noFill/>
-          </a:ln>
-        </p:spPr>
-        <p:txBody>
-          <a:bodyPr rtlCol="0" anchor="ctr"/>
-          <a:lstStyle/>
-          <a:p>
-            <a:pPr algn="ctr"/>
-          </a:p>
-        </p:txBody>
-      </p:sp>
-      <p:sp>
-        <p:nvSpPr>
-          <p:cNvPr id="6" name="Rounded Rectangle 5"/>
-          <p:cNvSpPr/>
-          <p:nvPr/>
-        </p:nvSpPr>
-        <p:spPr>
-          <a:xfrm>
-            <a:off x="2857320" y="1554120"/>
-            <a:ext cx="45360" cy="22680"/>
-          </a:xfrm>
-          <a:prstGeom prst="roundRect">
-            <a:avLst>
-              <a:gd name="adj" fmla="val 33333"/>
-            </a:avLst>
-          </a:prstGeom>
-          <a:solidFill>
-            <a:srgbClr val="FFFFFF"/>
-          </a:solidFill>
-          <a:ln>
-            <a:noFill/>
-          </a:ln>
-        </p:spPr>
-        <p:txBody>
-          <a:bodyPr rtlCol="0" anchor="ctr"/>
-          <a:lstStyle/>
-          <a:p>
-            <a:pPr algn="ctr"/>
-          </a:p>
-        </p:txBody>
-      </p:sp>
-      <p:sp>
-        <p:nvSpPr>
-          <p:cNvPr id="7" name="텍스트"/>
-          <p:cNvSpPr txBox="1"/>
-          <p:nvPr/>
-        </p:nvSpPr>
-        <p:spPr>
-          <a:xfrm>
-            <a:off x="252000" y="324000"/>
-            <a:ext cx="1944000" cy="720000"/>
+            <a:off x="1368000" y="324000"/>
+            <a:ext cx="504000" cy="360000"/>
           </a:xfrm>
           <a:prstGeom prst="rect">
             <a:avLst/>
@@ -3883,56 +3427,108 @@
           <a:noFill/>
         </p:spPr>
         <p:txBody>
+          <a:bodyPr wrap="square" lIns="0" rIns="0" tIns="0" bIns="0" anchor="ctr">
+            <a:spAutoFit/>
+          </a:bodyPr>
+          <a:lstStyle/>
+          <a:p>
+            <a:pPr algn="ctr">
+              <a:lnSpc>
+                <a:spcPts val="3769"/>
+              </a:lnSpc>
+            </a:pPr>
+            <a:r>
+              <a:rPr sz="2600" b="1">
+                <a:solidFill>
+                  <a:srgbClr val="12151C"/>
+                </a:solidFill>
+                <a:latin typeface="맑은 고딕"/>
+                <a:ea typeface="맑은 고딕"/>
+              </a:rPr>
+              <a:t>스</a:t>
+            </a:r>
+          </a:p>
+        </p:txBody>
+      </p:sp>
+      <p:sp>
+        <p:nvSpPr>
+          <p:cNvPr id="4" name="텍스트"/>
+          <p:cNvSpPr txBox="1"/>
+          <p:nvPr/>
+        </p:nvSpPr>
+        <p:spPr>
+          <a:xfrm>
+            <a:off x="360000" y="820800"/>
+            <a:ext cx="2520000" cy="161926"/>
+          </a:xfrm>
+          <a:prstGeom prst="rect">
+            <a:avLst/>
+          </a:prstGeom>
+          <a:noFill/>
+        </p:spPr>
+        <p:txBody>
           <a:bodyPr wrap="square" lIns="0" rIns="0" tIns="0" bIns="0" anchor="t">
             <a:spAutoFit/>
           </a:bodyPr>
           <a:lstStyle/>
           <a:p>
-            <a:pPr algn="l">
+            <a:pPr algn="ctr">
               <a:lnSpc>
-                <a:spcPts val="1739"/>
+                <a:spcPts val="1232"/>
               </a:lnSpc>
             </a:pPr>
             <a:r>
-              <a:rPr sz="1200" b="1">
+              <a:rPr sz="850" b="1" spc="200">
                 <a:solidFill>
                   <a:srgbClr val="FFFFFF"/>
                 </a:solidFill>
                 <a:latin typeface="맑은 고딕"/>
                 <a:ea typeface="맑은 고딕"/>
               </a:rPr>
-              <a:t>아이디어에 숨결을</a:t>
-            </a:r>
-          </a:p>
-          <a:p>
-            <a:pPr algn="l">
-              <a:lnSpc>
-                <a:spcPts val="1739"/>
-              </a:lnSpc>
-            </a:pPr>
-            <a:r>
-              <a:rPr sz="1200" b="1">
-                <a:solidFill>
-                  <a:srgbClr val="FFFFFF"/>
-                </a:solidFill>
-                <a:latin typeface="맑은 고딕"/>
-                <a:ea typeface="맑은 고딕"/>
-              </a:rPr>
-              <a:t>불어넣습니다</a:t>
-            </a:r>
-          </a:p>
-        </p:txBody>
-      </p:sp>
-      <p:sp>
-        <p:nvSpPr>
-          <p:cNvPr id="8" name="텍스트"/>
+              <a:t>스튜디오 이름</a:t>
+            </a:r>
+          </a:p>
+        </p:txBody>
+      </p:sp>
+      <p:sp>
+        <p:nvSpPr>
+          <p:cNvPr id="5" name="Rectangle 4"/>
+          <p:cNvSpPr/>
+          <p:nvPr/>
+        </p:nvSpPr>
+        <p:spPr>
+          <a:xfrm>
+            <a:off x="1530000" y="1051200"/>
+            <a:ext cx="180000" cy="14400"/>
+          </a:xfrm>
+          <a:prstGeom prst="rect">
+            <a:avLst/>
+          </a:prstGeom>
+          <a:solidFill>
+            <a:srgbClr val="FF8FB8"/>
+          </a:solidFill>
+          <a:ln>
+            <a:noFill/>
+          </a:ln>
+        </p:spPr>
+        <p:txBody>
+          <a:bodyPr rtlCol="0" anchor="ctr"/>
+          <a:lstStyle/>
+          <a:p>
+            <a:pPr algn="ctr"/>
+          </a:p>
+        </p:txBody>
+      </p:sp>
+      <p:sp>
+        <p:nvSpPr>
+          <p:cNvPr id="6" name="텍스트"/>
           <p:cNvSpPr txBox="1"/>
           <p:nvPr/>
         </p:nvSpPr>
         <p:spPr>
           <a:xfrm>
-            <a:off x="252000" y="1476000"/>
-            <a:ext cx="1440000" cy="108000"/>
+            <a:off x="540000" y="1188000"/>
+            <a:ext cx="2160000" cy="360000"/>
           </a:xfrm>
           <a:prstGeom prst="rect">
             <a:avLst/>
@@ -3945,20 +3541,20 @@
           </a:bodyPr>
           <a:lstStyle/>
           <a:p>
-            <a:pPr algn="l">
+            <a:pPr algn="ctr">
               <a:lnSpc>
-                <a:spcPts val="1087"/>
+                <a:spcPts val="1305"/>
               </a:lnSpc>
             </a:pPr>
             <a:r>
-              <a:rPr sz="750" b="1" spc="200">
+              <a:rPr sz="900" b="1">
                 <a:solidFill>
-                  <a:srgbClr val="B7C1B2"/>
+                  <a:srgbClr val="A3A9B5"/>
                 </a:solidFill>
                 <a:latin typeface="맑은 고딕"/>
                 <a:ea typeface="맑은 고딕"/>
               </a:rPr>
-              <a:t>스튜디오 이름</a:t>
+              <a:t>아이디어에 숨결을 불어넣습니다</a:t>
             </a:r>
           </a:p>
         </p:txBody>

--- a/public/fun/cards/creative/creative-03.pptx
+++ b/public/fun/cards/creative/creative-03.pptx
@@ -3097,25 +3097,193 @@
         <p:nvPr/>
       </p:nvGrpSpPr>
       <p:grpSpPr/>
-      <p:sp>
-        <p:nvSpPr>
-          <p:cNvPr id="2" name="Oval 1"/>
+      <p:cxnSp>
+        <p:nvCxnSpPr>
+          <p:cNvPr id="2" name="Connector 1"/>
+          <p:cNvCxnSpPr/>
+          <p:nvPr/>
+        </p:nvCxnSpPr>
+        <p:spPr>
+          <a:xfrm>
+            <a:off x="93600" y="122400"/>
+            <a:ext cx="57600" cy="0"/>
+          </a:xfrm>
+          <a:prstGeom prst="line">
+            <a:avLst/>
+          </a:prstGeom>
+          <a:ln w="3600">
+            <a:solidFill>
+              <a:srgbClr val="FFE0EB"/>
+            </a:solidFill>
+          </a:ln>
+        </p:spPr>
+      </p:cxnSp>
+      <p:cxnSp>
+        <p:nvCxnSpPr>
+          <p:cNvPr id="3" name="Connector 2"/>
+          <p:cNvCxnSpPr/>
+          <p:nvPr/>
+        </p:nvCxnSpPr>
+        <p:spPr>
+          <a:xfrm>
+            <a:off x="122400" y="93600"/>
+            <a:ext cx="0" cy="57600"/>
+          </a:xfrm>
+          <a:prstGeom prst="line">
+            <a:avLst/>
+          </a:prstGeom>
+          <a:ln w="3600">
+            <a:solidFill>
+              <a:srgbClr val="FFE0EB"/>
+            </a:solidFill>
+          </a:ln>
+        </p:spPr>
+      </p:cxnSp>
+      <p:cxnSp>
+        <p:nvCxnSpPr>
+          <p:cNvPr id="4" name="Connector 3"/>
+          <p:cNvCxnSpPr/>
+          <p:nvPr/>
+        </p:nvCxnSpPr>
+        <p:spPr>
+          <a:xfrm>
+            <a:off x="3088800" y="122400"/>
+            <a:ext cx="57600" cy="0"/>
+          </a:xfrm>
+          <a:prstGeom prst="line">
+            <a:avLst/>
+          </a:prstGeom>
+          <a:ln w="3600">
+            <a:solidFill>
+              <a:srgbClr val="FFE0EB"/>
+            </a:solidFill>
+          </a:ln>
+        </p:spPr>
+      </p:cxnSp>
+      <p:cxnSp>
+        <p:nvCxnSpPr>
+          <p:cNvPr id="5" name="Connector 4"/>
+          <p:cNvCxnSpPr/>
+          <p:nvPr/>
+        </p:nvCxnSpPr>
+        <p:spPr>
+          <a:xfrm>
+            <a:off x="3117600" y="93600"/>
+            <a:ext cx="0" cy="57600"/>
+          </a:xfrm>
+          <a:prstGeom prst="line">
+            <a:avLst/>
+          </a:prstGeom>
+          <a:ln w="3600">
+            <a:solidFill>
+              <a:srgbClr val="FFE0EB"/>
+            </a:solidFill>
+          </a:ln>
+        </p:spPr>
+      </p:cxnSp>
+      <p:cxnSp>
+        <p:nvCxnSpPr>
+          <p:cNvPr id="6" name="Connector 5"/>
+          <p:cNvCxnSpPr/>
+          <p:nvPr/>
+        </p:nvCxnSpPr>
+        <p:spPr>
+          <a:xfrm>
+            <a:off x="93600" y="1677600"/>
+            <a:ext cx="57600" cy="0"/>
+          </a:xfrm>
+          <a:prstGeom prst="line">
+            <a:avLst/>
+          </a:prstGeom>
+          <a:ln w="3600">
+            <a:solidFill>
+              <a:srgbClr val="FFE0EB"/>
+            </a:solidFill>
+          </a:ln>
+        </p:spPr>
+      </p:cxnSp>
+      <p:cxnSp>
+        <p:nvCxnSpPr>
+          <p:cNvPr id="7" name="Connector 6"/>
+          <p:cNvCxnSpPr/>
+          <p:nvPr/>
+        </p:nvCxnSpPr>
+        <p:spPr>
+          <a:xfrm>
+            <a:off x="122400" y="1648800"/>
+            <a:ext cx="0" cy="57600"/>
+          </a:xfrm>
+          <a:prstGeom prst="line">
+            <a:avLst/>
+          </a:prstGeom>
+          <a:ln w="3600">
+            <a:solidFill>
+              <a:srgbClr val="FFE0EB"/>
+            </a:solidFill>
+          </a:ln>
+        </p:spPr>
+      </p:cxnSp>
+      <p:cxnSp>
+        <p:nvCxnSpPr>
+          <p:cNvPr id="8" name="Connector 7"/>
+          <p:cNvCxnSpPr/>
+          <p:nvPr/>
+        </p:nvCxnSpPr>
+        <p:spPr>
+          <a:xfrm>
+            <a:off x="3088800" y="1677600"/>
+            <a:ext cx="57600" cy="0"/>
+          </a:xfrm>
+          <a:prstGeom prst="line">
+            <a:avLst/>
+          </a:prstGeom>
+          <a:ln w="3600">
+            <a:solidFill>
+              <a:srgbClr val="FFE0EB"/>
+            </a:solidFill>
+          </a:ln>
+        </p:spPr>
+      </p:cxnSp>
+      <p:cxnSp>
+        <p:nvCxnSpPr>
+          <p:cNvPr id="9" name="Connector 8"/>
+          <p:cNvCxnSpPr/>
+          <p:nvPr/>
+        </p:nvCxnSpPr>
+        <p:spPr>
+          <a:xfrm>
+            <a:off x="3117600" y="1648800"/>
+            <a:ext cx="0" cy="57600"/>
+          </a:xfrm>
+          <a:prstGeom prst="line">
+            <a:avLst/>
+          </a:prstGeom>
+          <a:ln w="3600">
+            <a:solidFill>
+              <a:srgbClr val="FFE0EB"/>
+            </a:solidFill>
+          </a:ln>
+        </p:spPr>
+      </p:cxnSp>
+      <p:sp>
+        <p:nvSpPr>
+          <p:cNvPr id="10" name="Oval 9"/>
           <p:cNvSpPr/>
           <p:nvPr/>
         </p:nvSpPr>
         <p:spPr>
           <a:xfrm>
-            <a:off x="1591200" y="208800"/>
-            <a:ext cx="57600" cy="57600"/>
+            <a:off x="1526400" y="237600"/>
+            <a:ext cx="187200" cy="187200"/>
           </a:xfrm>
           <a:prstGeom prst="ellipse">
             <a:avLst/>
           </a:prstGeom>
-          <a:solidFill>
-            <a:srgbClr val="FF8FB8"/>
-          </a:solidFill>
-          <a:ln>
-            <a:noFill/>
+          <a:noFill/>
+          <a:ln w="5040">
+            <a:solidFill>
+              <a:srgbClr val="FF8FB8"/>
+            </a:solidFill>
           </a:ln>
         </p:spPr>
         <p:txBody>
@@ -3128,14 +3296,14 @@
       </p:sp>
       <p:sp>
         <p:nvSpPr>
-          <p:cNvPr id="3" name="텍스트"/>
+          <p:cNvPr id="11" name="텍스트"/>
           <p:cNvSpPr txBox="1"/>
           <p:nvPr/>
         </p:nvSpPr>
         <p:spPr>
           <a:xfrm>
-            <a:off x="360000" y="468000"/>
-            <a:ext cx="2520000" cy="360000"/>
+            <a:off x="1476000" y="237600"/>
+            <a:ext cx="288000" cy="187200"/>
           </a:xfrm>
           <a:prstGeom prst="rect">
             <a:avLst/>
@@ -3143,6 +3311,46 @@
           <a:noFill/>
         </p:spPr>
         <p:txBody>
+          <a:bodyPr wrap="square" lIns="0" rIns="0" tIns="0" bIns="0" anchor="ctr">
+            <a:spAutoFit/>
+          </a:bodyPr>
+          <a:lstStyle/>
+          <a:p>
+            <a:pPr algn="ctr">
+              <a:lnSpc>
+                <a:spcPts val="1305"/>
+              </a:lnSpc>
+            </a:pPr>
+            <a:r>
+              <a:rPr sz="900" b="1">
+                <a:solidFill>
+                  <a:srgbClr val="FF8FB8"/>
+                </a:solidFill>
+                <a:latin typeface="맑은 고딕"/>
+                <a:ea typeface="맑은 고딕"/>
+              </a:rPr>
+              <a:t>스</a:t>
+            </a:r>
+          </a:p>
+        </p:txBody>
+      </p:sp>
+      <p:sp>
+        <p:nvSpPr>
+          <p:cNvPr id="12" name="텍스트"/>
+          <p:cNvSpPr txBox="1"/>
+          <p:nvPr/>
+        </p:nvSpPr>
+        <p:spPr>
+          <a:xfrm>
+            <a:off x="360000" y="540000"/>
+            <a:ext cx="2520000" cy="237600"/>
+          </a:xfrm>
+          <a:prstGeom prst="rect">
+            <a:avLst/>
+          </a:prstGeom>
+          <a:noFill/>
+        </p:spPr>
+        <p:txBody>
           <a:bodyPr wrap="square" lIns="0" rIns="0" tIns="0" bIns="0" anchor="t">
             <a:spAutoFit/>
           </a:bodyPr>
@@ -3150,11 +3358,11 @@
           <a:p>
             <a:pPr algn="ctr">
               <a:lnSpc>
-                <a:spcPts val="3190"/>
+                <a:spcPts val="1957"/>
               </a:lnSpc>
             </a:pPr>
             <a:r>
-              <a:rPr sz="2200" b="1">
+              <a:rPr sz="1350" b="1" spc="120">
                 <a:solidFill>
                   <a:srgbClr val="12151C"/>
                 </a:solidFill>
@@ -3168,14 +3376,14 @@
       </p:sp>
       <p:sp>
         <p:nvSpPr>
-          <p:cNvPr id="4" name="텍스트"/>
+          <p:cNvPr id="13" name="텍스트"/>
           <p:cNvSpPr txBox="1"/>
           <p:nvPr/>
         </p:nvSpPr>
         <p:spPr>
           <a:xfrm>
-            <a:off x="360000" y="878400"/>
-            <a:ext cx="2520000" cy="171451"/>
+            <a:off x="360000" y="792000"/>
+            <a:ext cx="2520000" cy="133351"/>
           </a:xfrm>
           <a:prstGeom prst="rect">
             <a:avLst/>
@@ -3190,11 +3398,11 @@
           <a:p>
             <a:pPr algn="ctr">
               <a:lnSpc>
-                <a:spcPts val="1305"/>
+                <a:spcPts val="1015"/>
               </a:lnSpc>
             </a:pPr>
             <a:r>
-              <a:rPr sz="900" b="0">
+              <a:rPr sz="700" b="0" spc="60">
                 <a:solidFill>
                   <a:srgbClr val="6C4357"/>
                 </a:solidFill>
@@ -3206,45 +3414,37 @@
           </a:p>
         </p:txBody>
       </p:sp>
-      <p:sp>
-        <p:nvSpPr>
-          <p:cNvPr id="5" name="Rectangle 4"/>
-          <p:cNvSpPr/>
+      <p:cxnSp>
+        <p:nvCxnSpPr>
+          <p:cNvPr id="14" name="Connector 13"/>
+          <p:cNvCxnSpPr/>
           <p:nvPr/>
-        </p:nvSpPr>
-        <p:spPr>
-          <a:xfrm>
-            <a:off x="1530000" y="1137600"/>
-            <a:ext cx="180000" cy="14400"/>
-          </a:xfrm>
-          <a:prstGeom prst="rect">
+        </p:nvCxnSpPr>
+        <p:spPr>
+          <a:xfrm>
+            <a:off x="1440000" y="1015200"/>
+            <a:ext cx="360000" cy="0"/>
+          </a:xfrm>
+          <a:prstGeom prst="line">
             <a:avLst/>
           </a:prstGeom>
-          <a:solidFill>
-            <a:srgbClr val="FF8FB8"/>
-          </a:solidFill>
-          <a:ln>
-            <a:noFill/>
+          <a:ln w="7920">
+            <a:solidFill>
+              <a:srgbClr val="FF8FB8"/>
+            </a:solidFill>
           </a:ln>
         </p:spPr>
-        <p:txBody>
-          <a:bodyPr rtlCol="0" anchor="ctr"/>
-          <a:lstStyle/>
-          <a:p>
-            <a:pPr algn="ctr"/>
-          </a:p>
-        </p:txBody>
-      </p:sp>
-      <p:sp>
-        <p:nvSpPr>
-          <p:cNvPr id="6" name="텍스트"/>
+      </p:cxnSp>
+      <p:sp>
+        <p:nvSpPr>
+          <p:cNvPr id="15" name="텍스트"/>
           <p:cNvSpPr txBox="1"/>
           <p:nvPr/>
         </p:nvSpPr>
         <p:spPr>
           <a:xfrm>
-            <a:off x="360000" y="1267200"/>
-            <a:ext cx="2520000" cy="133351"/>
+            <a:off x="360000" y="1101600"/>
+            <a:ext cx="2520000" cy="123826"/>
           </a:xfrm>
           <a:prstGeom prst="rect">
             <a:avLst/>
@@ -3259,32 +3459,72 @@
           <a:p>
             <a:pPr algn="ctr">
               <a:lnSpc>
-                <a:spcPts val="1015"/>
+                <a:spcPts val="942"/>
               </a:lnSpc>
             </a:pPr>
             <a:r>
-              <a:rPr sz="700" b="0">
+              <a:rPr sz="650" b="1" spc="220">
+                <a:solidFill>
+                  <a:srgbClr val="6C4357"/>
+                </a:solidFill>
+                <a:latin typeface="맑은 고딕"/>
+                <a:ea typeface="맑은 고딕"/>
+              </a:rPr>
+              <a:t>스튜디오 이름</a:t>
+            </a:r>
+          </a:p>
+        </p:txBody>
+      </p:sp>
+      <p:sp>
+        <p:nvSpPr>
+          <p:cNvPr id="16" name="텍스트"/>
+          <p:cNvSpPr txBox="1"/>
+          <p:nvPr/>
+        </p:nvSpPr>
+        <p:spPr>
+          <a:xfrm>
+            <a:off x="360000" y="1339200"/>
+            <a:ext cx="2520000" cy="123826"/>
+          </a:xfrm>
+          <a:prstGeom prst="rect">
+            <a:avLst/>
+          </a:prstGeom>
+          <a:noFill/>
+        </p:spPr>
+        <p:txBody>
+          <a:bodyPr wrap="square" lIns="0" rIns="0" tIns="0" bIns="0" anchor="t">
+            <a:spAutoFit/>
+          </a:bodyPr>
+          <a:lstStyle/>
+          <a:p>
+            <a:pPr algn="ctr">
+              <a:lnSpc>
+                <a:spcPts val="942"/>
+              </a:lnSpc>
+            </a:pPr>
+            <a:r>
+              <a:rPr sz="650" b="0">
                 <a:solidFill>
                   <a:srgbClr val="12151C"/>
                 </a:solidFill>
                 <a:latin typeface="맑은 고딕"/>
                 <a:ea typeface="맑은 고딕"/>
               </a:rPr>
-              <a:t>010-1234-5678      name@example.com</a:t>
-            </a:r>
-          </a:p>
-        </p:txBody>
-      </p:sp>
-      <p:sp>
-        <p:nvSpPr>
-          <p:cNvPr id="7" name="텍스트"/>
+              <a:t>010-1234-5678     |     name@example.com</a:t>
+            </a:r>
+          </a:p>
+        </p:txBody>
+      </p:sp>
+      <p:sp>
+        <p:nvSpPr>
+          <p:cNvPr id="17" name="텍스트"/>
           <p:cNvSpPr txBox="1"/>
           <p:nvPr/>
         </p:nvSpPr>
         <p:spPr>
           <a:xfrm>
-            <a:off x="360000" y="1425600"/>
-            <a:ext cx="2520000" cy="133351"/>
+            <a:off x="360000" y="1476000"/>
+            <a:ext cx="2520000" cy="123826"/>
           </a:xfrm>
           <a:prstGeom prst="rect">
             <a:avLst/>
@@ -3299,11 +3539,11 @@
           <a:p>
             <a:pPr algn="ctr">
               <a:lnSpc>
-                <a:spcPts val="1015"/>
+                <a:spcPts val="942"/>
               </a:lnSpc>
             </a:pPr>
             <a:r>
-              <a:rPr sz="700" b="0">
+              <a:rPr sz="650" b="0">
                 <a:solidFill>
                   <a:srgbClr val="6C4357"/>
                 </a:solidFill>
@@ -3311,46 +3551,6 @@
                 <a:ea typeface="맑은 고딕"/>
               </a:rPr>
               <a:t>주소를 입력해 주세요</a:t>
-            </a:r>
-          </a:p>
-        </p:txBody>
-      </p:sp>
-      <p:sp>
-        <p:nvSpPr>
-          <p:cNvPr id="8" name="텍스트"/>
-          <p:cNvSpPr txBox="1"/>
-          <p:nvPr/>
-        </p:nvSpPr>
-        <p:spPr>
-          <a:xfrm>
-            <a:off x="360000" y="1576800"/>
-            <a:ext cx="2520000" cy="104776"/>
-          </a:xfrm>
-          <a:prstGeom prst="rect">
-            <a:avLst/>
-          </a:prstGeom>
-          <a:noFill/>
-        </p:spPr>
-        <p:txBody>
-          <a:bodyPr wrap="square" lIns="0" rIns="0" tIns="0" bIns="0" anchor="t">
-            <a:spAutoFit/>
-          </a:bodyPr>
-          <a:lstStyle/>
-          <a:p>
-            <a:pPr algn="ctr">
-              <a:lnSpc>
-                <a:spcPts val="797"/>
-              </a:lnSpc>
-            </a:pPr>
-            <a:r>
-              <a:rPr sz="550" b="1" spc="300">
-                <a:solidFill>
-                  <a:srgbClr val="6C4357"/>
-                </a:solidFill>
-                <a:latin typeface="맑은 고딕"/>
-                <a:ea typeface="맑은 고딕"/>
-              </a:rPr>
-              <a:t>스튜디오 이름</a:t>
             </a:r>
           </a:p>
         </p:txBody>
@@ -3383,43 +3583,14 @@
       <p:grpSpPr/>
       <p:sp>
         <p:nvSpPr>
-          <p:cNvPr id="2" name="Oval 1"/>
-          <p:cNvSpPr/>
-          <p:nvPr/>
-        </p:nvSpPr>
-        <p:spPr>
-          <a:xfrm>
-            <a:off x="1411200" y="295200"/>
-            <a:ext cx="417600" cy="417600"/>
-          </a:xfrm>
-          <a:prstGeom prst="ellipse">
-            <a:avLst/>
-          </a:prstGeom>
-          <a:solidFill>
-            <a:srgbClr val="FF8FB8"/>
-          </a:solidFill>
-          <a:ln>
-            <a:noFill/>
-          </a:ln>
-        </p:spPr>
-        <p:txBody>
-          <a:bodyPr rtlCol="0" anchor="ctr"/>
-          <a:lstStyle/>
-          <a:p>
-            <a:pPr algn="ctr"/>
-          </a:p>
-        </p:txBody>
-      </p:sp>
-      <p:sp>
-        <p:nvSpPr>
-          <p:cNvPr id="3" name="텍스트"/>
+          <p:cNvPr id="2" name="텍스트"/>
           <p:cNvSpPr txBox="1"/>
           <p:nvPr/>
         </p:nvSpPr>
         <p:spPr>
           <a:xfrm>
-            <a:off x="1368000" y="324000"/>
-            <a:ext cx="504000" cy="360000"/>
+            <a:off x="252000" y="252000"/>
+            <a:ext cx="1080000" cy="99061"/>
           </a:xfrm>
           <a:prstGeom prst="rect">
             <a:avLst/>
@@ -3427,79 +3598,39 @@
           <a:noFill/>
         </p:spPr>
         <p:txBody>
-          <a:bodyPr wrap="square" lIns="0" rIns="0" tIns="0" bIns="0" anchor="ctr">
+          <a:bodyPr wrap="square" lIns="0" rIns="0" tIns="0" bIns="0" anchor="t">
             <a:spAutoFit/>
           </a:bodyPr>
           <a:lstStyle/>
           <a:p>
-            <a:pPr algn="ctr">
+            <a:pPr algn="l">
               <a:lnSpc>
-                <a:spcPts val="3769"/>
+                <a:spcPts val="754"/>
               </a:lnSpc>
             </a:pPr>
             <a:r>
-              <a:rPr sz="2600" b="1">
+              <a:rPr sz="520" b="1" spc="240">
                 <a:solidFill>
-                  <a:srgbClr val="12151C"/>
+                  <a:srgbClr val="A3A9B5"/>
                 </a:solidFill>
                 <a:latin typeface="맑은 고딕"/>
                 <a:ea typeface="맑은 고딕"/>
               </a:rPr>
-              <a:t>스</a:t>
-            </a:r>
-          </a:p>
-        </p:txBody>
-      </p:sp>
-      <p:sp>
-        <p:nvSpPr>
-          <p:cNvPr id="4" name="텍스트"/>
-          <p:cNvSpPr txBox="1"/>
-          <p:nvPr/>
-        </p:nvSpPr>
-        <p:spPr>
-          <a:xfrm>
-            <a:off x="360000" y="820800"/>
-            <a:ext cx="2520000" cy="161926"/>
-          </a:xfrm>
-          <a:prstGeom prst="rect">
-            <a:avLst/>
-          </a:prstGeom>
-          <a:noFill/>
-        </p:spPr>
-        <p:txBody>
-          <a:bodyPr wrap="square" lIns="0" rIns="0" tIns="0" bIns="0" anchor="t">
-            <a:spAutoFit/>
-          </a:bodyPr>
-          <a:lstStyle/>
-          <a:p>
-            <a:pPr algn="ctr">
-              <a:lnSpc>
-                <a:spcPts val="1232"/>
-              </a:lnSpc>
-            </a:pPr>
-            <a:r>
-              <a:rPr sz="850" b="1" spc="200">
-                <a:solidFill>
-                  <a:srgbClr val="FFFFFF"/>
-                </a:solidFill>
-                <a:latin typeface="맑은 고딕"/>
-                <a:ea typeface="맑은 고딕"/>
-              </a:rPr>
-              <a:t>스튜디오 이름</a:t>
-            </a:r>
-          </a:p>
-        </p:txBody>
-      </p:sp>
-      <p:sp>
-        <p:nvSpPr>
-          <p:cNvPr id="5" name="Rectangle 4"/>
+              <a:t>작업 분야</a:t>
+            </a:r>
+          </a:p>
+        </p:txBody>
+      </p:sp>
+      <p:sp>
+        <p:nvSpPr>
+          <p:cNvPr id="3" name="Rectangle 2"/>
           <p:cNvSpPr/>
           <p:nvPr/>
         </p:nvSpPr>
         <p:spPr>
           <a:xfrm>
-            <a:off x="1530000" y="1051200"/>
-            <a:ext cx="180000" cy="14400"/>
+            <a:off x="252000" y="367200"/>
+            <a:ext cx="108000" cy="14400"/>
           </a:xfrm>
           <a:prstGeom prst="rect">
             <a:avLst/>
@@ -3521,14 +3652,45 @@
       </p:sp>
       <p:sp>
         <p:nvSpPr>
-          <p:cNvPr id="6" name="텍스트"/>
+          <p:cNvPr id="4" name="Rounded Rectangle 3"/>
+          <p:cNvSpPr/>
+          <p:nvPr/>
+        </p:nvSpPr>
+        <p:spPr>
+          <a:xfrm>
+            <a:off x="252000" y="540000"/>
+            <a:ext cx="666200" cy="194361"/>
+          </a:xfrm>
+          <a:prstGeom prst="roundRect">
+            <a:avLst>
+              <a:gd name="adj" fmla="val 50000"/>
+            </a:avLst>
+          </a:prstGeom>
+          <a:noFill/>
+          <a:ln w="3600">
+            <a:solidFill>
+              <a:srgbClr val="A3A9B5"/>
+            </a:solidFill>
+          </a:ln>
+        </p:spPr>
+        <p:txBody>
+          <a:bodyPr rtlCol="0" anchor="ctr"/>
+          <a:lstStyle/>
+          <a:p>
+            <a:pPr algn="ctr"/>
+          </a:p>
+        </p:txBody>
+      </p:sp>
+      <p:sp>
+        <p:nvSpPr>
+          <p:cNvPr id="5" name="텍스트"/>
           <p:cNvSpPr txBox="1"/>
           <p:nvPr/>
         </p:nvSpPr>
         <p:spPr>
           <a:xfrm>
-            <a:off x="540000" y="1188000"/>
-            <a:ext cx="2160000" cy="360000"/>
+            <a:off x="252000" y="540000"/>
+            <a:ext cx="666200" cy="194361"/>
           </a:xfrm>
           <a:prstGeom prst="rect">
             <a:avLst/>
@@ -3536,25 +3698,459 @@
           <a:noFill/>
         </p:spPr>
         <p:txBody>
+          <a:bodyPr wrap="square" lIns="0" rIns="0" tIns="0" bIns="0" anchor="ctr">
+            <a:spAutoFit/>
+          </a:bodyPr>
+          <a:lstStyle/>
+          <a:p>
+            <a:pPr algn="ctr">
+              <a:lnSpc>
+                <a:spcPts val="986"/>
+              </a:lnSpc>
+            </a:pPr>
+            <a:r>
+              <a:rPr sz="680" b="0">
+                <a:solidFill>
+                  <a:srgbClr val="FFFFFF"/>
+                </a:solidFill>
+                <a:latin typeface="맑은 고딕"/>
+                <a:ea typeface="맑은 고딕"/>
+              </a:rPr>
+              <a:t>로고 디자인</a:t>
+            </a:r>
+          </a:p>
+        </p:txBody>
+      </p:sp>
+      <p:sp>
+        <p:nvSpPr>
+          <p:cNvPr id="6" name="Rounded Rectangle 5"/>
+          <p:cNvSpPr/>
+          <p:nvPr/>
+        </p:nvSpPr>
+        <p:spPr>
+          <a:xfrm>
+            <a:off x="968600" y="540000"/>
+            <a:ext cx="666200" cy="194361"/>
+          </a:xfrm>
+          <a:prstGeom prst="roundRect">
+            <a:avLst>
+              <a:gd name="adj" fmla="val 50000"/>
+            </a:avLst>
+          </a:prstGeom>
+          <a:noFill/>
+          <a:ln w="3600">
+            <a:solidFill>
+              <a:srgbClr val="A3A9B5"/>
+            </a:solidFill>
+          </a:ln>
+        </p:spPr>
+        <p:txBody>
+          <a:bodyPr rtlCol="0" anchor="ctr"/>
+          <a:lstStyle/>
+          <a:p>
+            <a:pPr algn="ctr"/>
+          </a:p>
+        </p:txBody>
+      </p:sp>
+      <p:sp>
+        <p:nvSpPr>
+          <p:cNvPr id="7" name="텍스트"/>
+          <p:cNvSpPr txBox="1"/>
+          <p:nvPr/>
+        </p:nvSpPr>
+        <p:spPr>
+          <a:xfrm>
+            <a:off x="968600" y="540000"/>
+            <a:ext cx="666200" cy="194361"/>
+          </a:xfrm>
+          <a:prstGeom prst="rect">
+            <a:avLst/>
+          </a:prstGeom>
+          <a:noFill/>
+        </p:spPr>
+        <p:txBody>
+          <a:bodyPr wrap="square" lIns="0" rIns="0" tIns="0" bIns="0" anchor="ctr">
+            <a:spAutoFit/>
+          </a:bodyPr>
+          <a:lstStyle/>
+          <a:p>
+            <a:pPr algn="ctr">
+              <a:lnSpc>
+                <a:spcPts val="986"/>
+              </a:lnSpc>
+            </a:pPr>
+            <a:r>
+              <a:rPr sz="680" b="0">
+                <a:solidFill>
+                  <a:srgbClr val="FFFFFF"/>
+                </a:solidFill>
+                <a:latin typeface="맑은 고딕"/>
+                <a:ea typeface="맑은 고딕"/>
+              </a:rPr>
+              <a:t>편집 디자인</a:t>
+            </a:r>
+          </a:p>
+        </p:txBody>
+      </p:sp>
+      <p:sp>
+        <p:nvSpPr>
+          <p:cNvPr id="8" name="Rounded Rectangle 7"/>
+          <p:cNvSpPr/>
+          <p:nvPr/>
+        </p:nvSpPr>
+        <p:spPr>
+          <a:xfrm>
+            <a:off x="1685200" y="540000"/>
+            <a:ext cx="581567" cy="194361"/>
+          </a:xfrm>
+          <a:prstGeom prst="roundRect">
+            <a:avLst>
+              <a:gd name="adj" fmla="val 50000"/>
+            </a:avLst>
+          </a:prstGeom>
+          <a:noFill/>
+          <a:ln w="3600">
+            <a:solidFill>
+              <a:srgbClr val="A3A9B5"/>
+            </a:solidFill>
+          </a:ln>
+        </p:spPr>
+        <p:txBody>
+          <a:bodyPr rtlCol="0" anchor="ctr"/>
+          <a:lstStyle/>
+          <a:p>
+            <a:pPr algn="ctr"/>
+          </a:p>
+        </p:txBody>
+      </p:sp>
+      <p:sp>
+        <p:nvSpPr>
+          <p:cNvPr id="9" name="텍스트"/>
+          <p:cNvSpPr txBox="1"/>
+          <p:nvPr/>
+        </p:nvSpPr>
+        <p:spPr>
+          <a:xfrm>
+            <a:off x="1685200" y="540000"/>
+            <a:ext cx="581567" cy="194361"/>
+          </a:xfrm>
+          <a:prstGeom prst="rect">
+            <a:avLst/>
+          </a:prstGeom>
+          <a:noFill/>
+        </p:spPr>
+        <p:txBody>
+          <a:bodyPr wrap="square" lIns="0" rIns="0" tIns="0" bIns="0" anchor="ctr">
+            <a:spAutoFit/>
+          </a:bodyPr>
+          <a:lstStyle/>
+          <a:p>
+            <a:pPr algn="ctr">
+              <a:lnSpc>
+                <a:spcPts val="986"/>
+              </a:lnSpc>
+            </a:pPr>
+            <a:r>
+              <a:rPr sz="680" b="0">
+                <a:solidFill>
+                  <a:srgbClr val="FFFFFF"/>
+                </a:solidFill>
+                <a:latin typeface="맑은 고딕"/>
+                <a:ea typeface="맑은 고딕"/>
+              </a:rPr>
+              <a:t>인물 촬영</a:t>
+            </a:r>
+          </a:p>
+        </p:txBody>
+      </p:sp>
+      <p:sp>
+        <p:nvSpPr>
+          <p:cNvPr id="10" name="Rounded Rectangle 9"/>
+          <p:cNvSpPr/>
+          <p:nvPr/>
+        </p:nvSpPr>
+        <p:spPr>
+          <a:xfrm>
+            <a:off x="2317167" y="540000"/>
+            <a:ext cx="581567" cy="194361"/>
+          </a:xfrm>
+          <a:prstGeom prst="roundRect">
+            <a:avLst>
+              <a:gd name="adj" fmla="val 50000"/>
+            </a:avLst>
+          </a:prstGeom>
+          <a:noFill/>
+          <a:ln w="3600">
+            <a:solidFill>
+              <a:srgbClr val="A3A9B5"/>
+            </a:solidFill>
+          </a:ln>
+        </p:spPr>
+        <p:txBody>
+          <a:bodyPr rtlCol="0" anchor="ctr"/>
+          <a:lstStyle/>
+          <a:p>
+            <a:pPr algn="ctr"/>
+          </a:p>
+        </p:txBody>
+      </p:sp>
+      <p:sp>
+        <p:nvSpPr>
+          <p:cNvPr id="11" name="텍스트"/>
+          <p:cNvSpPr txBox="1"/>
+          <p:nvPr/>
+        </p:nvSpPr>
+        <p:spPr>
+          <a:xfrm>
+            <a:off x="2317167" y="540000"/>
+            <a:ext cx="581567" cy="194361"/>
+          </a:xfrm>
+          <a:prstGeom prst="rect">
+            <a:avLst/>
+          </a:prstGeom>
+          <a:noFill/>
+        </p:spPr>
+        <p:txBody>
+          <a:bodyPr wrap="square" lIns="0" rIns="0" tIns="0" bIns="0" anchor="ctr">
+            <a:spAutoFit/>
+          </a:bodyPr>
+          <a:lstStyle/>
+          <a:p>
+            <a:pPr algn="ctr">
+              <a:lnSpc>
+                <a:spcPts val="986"/>
+              </a:lnSpc>
+            </a:pPr>
+            <a:r>
+              <a:rPr sz="680" b="0">
+                <a:solidFill>
+                  <a:srgbClr val="FFFFFF"/>
+                </a:solidFill>
+                <a:latin typeface="맑은 고딕"/>
+                <a:ea typeface="맑은 고딕"/>
+              </a:rPr>
+              <a:t>캘리그라피</a:t>
+            </a:r>
+          </a:p>
+        </p:txBody>
+      </p:sp>
+      <p:cxnSp>
+        <p:nvCxnSpPr>
+          <p:cNvPr id="12" name="Connector 11"/>
+          <p:cNvCxnSpPr/>
+          <p:nvPr/>
+        </p:nvCxnSpPr>
+        <p:spPr>
+          <a:xfrm>
+            <a:off x="252000" y="1339200"/>
+            <a:ext cx="2736000" cy="0"/>
+          </a:xfrm>
+          <a:prstGeom prst="line">
+            <a:avLst/>
+          </a:prstGeom>
+          <a:ln w="3600">
+            <a:solidFill>
+              <a:srgbClr val="2A2F38"/>
+            </a:solidFill>
+          </a:ln>
+        </p:spPr>
+      </p:cxnSp>
+      <p:sp>
+        <p:nvSpPr>
+          <p:cNvPr id="13" name="텍스트"/>
+          <p:cNvSpPr txBox="1"/>
+          <p:nvPr/>
+        </p:nvSpPr>
+        <p:spPr>
+          <a:xfrm>
+            <a:off x="252000" y="1422000"/>
+            <a:ext cx="396000" cy="91441"/>
+          </a:xfrm>
+          <a:prstGeom prst="rect">
+            <a:avLst/>
+          </a:prstGeom>
+          <a:noFill/>
+        </p:spPr>
+        <p:txBody>
           <a:bodyPr wrap="square" lIns="0" rIns="0" tIns="0" bIns="0" anchor="t">
             <a:spAutoFit/>
           </a:bodyPr>
           <a:lstStyle/>
           <a:p>
-            <a:pPr algn="ctr">
+            <a:pPr algn="l">
               <a:lnSpc>
-                <a:spcPts val="1305"/>
+                <a:spcPts val="696"/>
               </a:lnSpc>
             </a:pPr>
             <a:r>
-              <a:rPr sz="900" b="1">
+              <a:rPr sz="480" b="1" spc="140">
                 <a:solidFill>
                   <a:srgbClr val="A3A9B5"/>
                 </a:solidFill>
                 <a:latin typeface="맑은 고딕"/>
                 <a:ea typeface="맑은 고딕"/>
               </a:rPr>
-              <a:t>아이디어에 숨결을 불어넣습니다</a:t>
+              <a:t>HOURS</a:t>
+            </a:r>
+          </a:p>
+        </p:txBody>
+      </p:sp>
+      <p:sp>
+        <p:nvSpPr>
+          <p:cNvPr id="14" name="텍스트"/>
+          <p:cNvSpPr txBox="1"/>
+          <p:nvPr/>
+        </p:nvSpPr>
+        <p:spPr>
+          <a:xfrm>
+            <a:off x="648000" y="1411200"/>
+            <a:ext cx="2340000" cy="121921"/>
+          </a:xfrm>
+          <a:prstGeom prst="rect">
+            <a:avLst/>
+          </a:prstGeom>
+          <a:noFill/>
+        </p:spPr>
+        <p:txBody>
+          <a:bodyPr wrap="square" lIns="0" rIns="0" tIns="0" bIns="0" anchor="t">
+            <a:spAutoFit/>
+          </a:bodyPr>
+          <a:lstStyle/>
+          <a:p>
+            <a:pPr algn="l">
+              <a:lnSpc>
+                <a:spcPts val="927"/>
+              </a:lnSpc>
+            </a:pPr>
+            <a:r>
+              <a:rPr sz="640" b="0">
+                <a:solidFill>
+                  <a:srgbClr val="FFFFFF"/>
+                </a:solidFill>
+                <a:latin typeface="맑은 고딕"/>
+                <a:ea typeface="맑은 고딕"/>
+              </a:rPr>
+              <a:t>메일 · 메시지 문의</a:t>
+            </a:r>
+          </a:p>
+        </p:txBody>
+      </p:sp>
+      <p:sp>
+        <p:nvSpPr>
+          <p:cNvPr id="15" name="텍스트"/>
+          <p:cNvSpPr txBox="1"/>
+          <p:nvPr/>
+        </p:nvSpPr>
+        <p:spPr>
+          <a:xfrm>
+            <a:off x="252000" y="1580400"/>
+            <a:ext cx="396000" cy="91441"/>
+          </a:xfrm>
+          <a:prstGeom prst="rect">
+            <a:avLst/>
+          </a:prstGeom>
+          <a:noFill/>
+        </p:spPr>
+        <p:txBody>
+          <a:bodyPr wrap="square" lIns="0" rIns="0" tIns="0" bIns="0" anchor="t">
+            <a:spAutoFit/>
+          </a:bodyPr>
+          <a:lstStyle/>
+          <a:p>
+            <a:pPr algn="l">
+              <a:lnSpc>
+                <a:spcPts val="696"/>
+              </a:lnSpc>
+            </a:pPr>
+            <a:r>
+              <a:rPr sz="480" b="1" spc="140">
+                <a:solidFill>
+                  <a:srgbClr val="A3A9B5"/>
+                </a:solidFill>
+                <a:latin typeface="맑은 고딕"/>
+                <a:ea typeface="맑은 고딕"/>
+              </a:rPr>
+              <a:t>INSTAGRAM</a:t>
+            </a:r>
+          </a:p>
+        </p:txBody>
+      </p:sp>
+      <p:sp>
+        <p:nvSpPr>
+          <p:cNvPr id="16" name="텍스트"/>
+          <p:cNvSpPr txBox="1"/>
+          <p:nvPr/>
+        </p:nvSpPr>
+        <p:spPr>
+          <a:xfrm>
+            <a:off x="648000" y="1569600"/>
+            <a:ext cx="2340000" cy="121921"/>
+          </a:xfrm>
+          <a:prstGeom prst="rect">
+            <a:avLst/>
+          </a:prstGeom>
+          <a:noFill/>
+        </p:spPr>
+        <p:txBody>
+          <a:bodyPr wrap="square" lIns="0" rIns="0" tIns="0" bIns="0" anchor="t">
+            <a:spAutoFit/>
+          </a:bodyPr>
+          <a:lstStyle/>
+          <a:p>
+            <a:pPr algn="l">
+              <a:lnSpc>
+                <a:spcPts val="927"/>
+              </a:lnSpc>
+            </a:pPr>
+            <a:r>
+              <a:rPr sz="640" b="0">
+                <a:solidFill>
+                  <a:srgbClr val="FFFFFF"/>
+                </a:solidFill>
+                <a:latin typeface="맑은 고딕"/>
+                <a:ea typeface="맑은 고딕"/>
+              </a:rPr>
+              <a:t>@아이디</a:t>
+            </a:r>
+          </a:p>
+        </p:txBody>
+      </p:sp>
+      <p:sp>
+        <p:nvSpPr>
+          <p:cNvPr id="17" name="텍스트"/>
+          <p:cNvSpPr txBox="1"/>
+          <p:nvPr/>
+        </p:nvSpPr>
+        <p:spPr>
+          <a:xfrm>
+            <a:off x="1548000" y="1411200"/>
+            <a:ext cx="1440000" cy="123826"/>
+          </a:xfrm>
+          <a:prstGeom prst="rect">
+            <a:avLst/>
+          </a:prstGeom>
+          <a:noFill/>
+        </p:spPr>
+        <p:txBody>
+          <a:bodyPr wrap="square" lIns="0" rIns="0" tIns="0" bIns="0" anchor="t">
+            <a:spAutoFit/>
+          </a:bodyPr>
+          <a:lstStyle/>
+          <a:p>
+            <a:pPr algn="r">
+              <a:lnSpc>
+                <a:spcPts val="942"/>
+              </a:lnSpc>
+            </a:pPr>
+            <a:r>
+              <a:rPr sz="650" b="1" spc="220">
+                <a:solidFill>
+                  <a:srgbClr val="A3A9B5"/>
+                </a:solidFill>
+                <a:latin typeface="맑은 고딕"/>
+                <a:ea typeface="맑은 고딕"/>
+              </a:rPr>
+              <a:t>스튜디오 이름</a:t>
             </a:r>
           </a:p>
         </p:txBody>
